--- a/solutions/aws/ai/intelligent-document-processing/delivery/closeout-presentation.pptx
+++ b/solutions/aws/ai/intelligent-document-processing/delivery/closeout-presentation.pptx
@@ -7475,7 +7475,7 @@
           <a:lstStyle/>
           <a:p>
             <a:r>
-              <a:t>Project Manager | December 02, 2025</a:t>
+              <a:t>Project Manager | April 07, 2026</a:t>
             </a:r>
           </a:p>
         </p:txBody>
